--- a/effect-tests/multi-style-pptx-v1/pptx/oriental-heritage.pptx
+++ b/effect-tests/multi-style-pptx-v1/pptx/oriental-heritage.pptx
@@ -900,8 +900,8 @@
         </p:nvSpPr>
         <p:spPr>
           <a:xfrm>
-            <a:off x="786384" y="749808"/>
-            <a:ext cx="5303520" cy="676656"/>
+            <a:off x="694944" y="749808"/>
+            <a:ext cx="4434840" cy="621792"/>
           </a:xfrm>
           <a:prstGeom prst="rect">
             <a:avLst/>
@@ -955,8 +955,8 @@
         </p:nvSpPr>
         <p:spPr>
           <a:xfrm>
-            <a:off x="822960" y="1463040"/>
-            <a:ext cx="4754880" cy="310896"/>
+            <a:off x="713232" y="1371600"/>
+            <a:ext cx="3703320" cy="310896"/>
           </a:xfrm>
           <a:prstGeom prst="rect">
             <a:avLst/>
@@ -996,21 +996,17 @@
         </p:nvSpPr>
         <p:spPr>
           <a:xfrm>
-            <a:off x="841248" y="2011680"/>
-            <a:ext cx="420624" cy="420624"/>
-          </a:xfrm>
-          <a:prstGeom prst="ellipse">
-            <a:avLst/>
-          </a:prstGeom>
-          <a:solidFill>
-            <a:srgbClr val="B8201A">
-              <a:alpha val="92000"/>
-            </a:srgbClr>
-          </a:solidFill>
+            <a:off x="1005840" y="1847088"/>
+            <a:ext cx="0" cy="2468880"/>
+          </a:xfrm>
+          <a:prstGeom prst="line">
+            <a:avLst/>
+          </a:prstGeom>
+          <a:noFill/>
           <a:ln w="12700">
             <a:solidFill>
-              <a:srgbClr val="FFFFFF">
-                <a:alpha val="88000"/>
+              <a:srgbClr val="B8201A">
+                <a:alpha val="64000"/>
               </a:srgbClr>
             </a:solidFill>
             <a:prstDash val="solid"/>
@@ -1019,148 +1015,25 @@
       </p:sp>
       <p:sp>
         <p:nvSpPr>
-          <p:cNvPr id="6" name="Text 3"/>
-          <p:cNvSpPr/>
-          <p:nvPr/>
-        </p:nvSpPr>
-        <p:spPr>
-          <a:xfrm>
-            <a:off x="841248" y="2121408"/>
-            <a:ext cx="420624" cy="146304"/>
-          </a:xfrm>
-          <a:prstGeom prst="rect">
-            <a:avLst/>
-          </a:prstGeom>
-          <a:noFill/>
-          <a:ln/>
-        </p:spPr>
-        <p:txBody>
-          <a:bodyPr wrap="square" lIns="0" tIns="0" rIns="0" bIns="0" rtlCol="0" anchor="ctr"/>
-          <a:lstStyle/>
-          <a:p>
-            <a:pPr algn="ctr" indent="0" marL="0">
-              <a:buNone/>
-            </a:pPr>
-            <a:r>
-              <a:rPr lang="en-US" sz="850" b="1" dirty="0">
-                <a:solidFill>
-                  <a:srgbClr val="FFFFFF"/>
-                </a:solidFill>
-                <a:latin typeface="Songti SC" pitchFamily="34" charset="0"/>
-                <a:ea typeface="Songti SC" pitchFamily="34" charset="-122"/>
-                <a:cs typeface="Songti SC" pitchFamily="34" charset="-120"/>
-              </a:rPr>
-              <a:t>承</a:t>
-            </a:r>
-            <a:endParaRPr lang="en-US" sz="850" dirty="0"/>
-          </a:p>
-        </p:txBody>
-      </p:sp>
-      <p:sp>
-        <p:nvSpPr>
-          <p:cNvPr id="7" name="Text 4"/>
-          <p:cNvSpPr/>
-          <p:nvPr/>
-        </p:nvSpPr>
-        <p:spPr>
-          <a:xfrm>
-            <a:off x="1499616" y="2011680"/>
-            <a:ext cx="4005072" cy="256032"/>
-          </a:xfrm>
-          <a:prstGeom prst="rect">
-            <a:avLst/>
-          </a:prstGeom>
-          <a:noFill/>
-          <a:ln/>
-        </p:spPr>
-        <p:txBody>
-          <a:bodyPr wrap="square" lIns="0" tIns="0" rIns="0" bIns="0" rtlCol="0" anchor="ctr">
-            <a:normAutofit/>
-          </a:bodyPr>
-          <a:lstStyle/>
-          <a:p>
-            <a:pPr indent="0" marL="0">
-              <a:buNone/>
-            </a:pPr>
-            <a:r>
-              <a:rPr lang="en-US" sz="1240" b="1" dirty="0">
-                <a:solidFill>
-                  <a:srgbClr val="211A16"/>
-                </a:solidFill>
-                <a:latin typeface="Songti SC" pitchFamily="34" charset="0"/>
-                <a:ea typeface="Songti SC" pitchFamily="34" charset="-122"/>
-                <a:cs typeface="Songti SC" pitchFamily="34" charset="-120"/>
-              </a:rPr>
-              <a:t>文化表达从符号转向体系</a:t>
-            </a:r>
-            <a:endParaRPr lang="en-US" sz="1240" dirty="0"/>
-          </a:p>
-        </p:txBody>
-      </p:sp>
-      <p:sp>
-        <p:nvSpPr>
-          <p:cNvPr id="8" name="Text 5"/>
-          <p:cNvSpPr/>
-          <p:nvPr/>
-        </p:nvSpPr>
-        <p:spPr>
-          <a:xfrm>
-            <a:off x="1499616" y="2322576"/>
-            <a:ext cx="4005072" cy="201168"/>
-          </a:xfrm>
-          <a:prstGeom prst="rect">
-            <a:avLst/>
-          </a:prstGeom>
-          <a:noFill/>
-          <a:ln/>
-        </p:spPr>
-        <p:txBody>
-          <a:bodyPr wrap="square" lIns="0" tIns="0" rIns="0" bIns="0" rtlCol="0" anchor="ctr">
-            <a:normAutofit/>
-          </a:bodyPr>
-          <a:lstStyle/>
-          <a:p>
-            <a:pPr indent="0" marL="0">
-              <a:buNone/>
-            </a:pPr>
-            <a:r>
-              <a:rPr lang="en-US" sz="840" dirty="0">
-                <a:solidFill>
-                  <a:srgbClr val="66584E"/>
-                </a:solidFill>
-                <a:latin typeface="Songti SC" pitchFamily="34" charset="0"/>
-                <a:ea typeface="Songti SC" pitchFamily="34" charset="-122"/>
-                <a:cs typeface="Songti SC" pitchFamily="34" charset="-120"/>
-              </a:rPr>
-              <a:t>水墨、器物、纹样和叙事需要统一成可复用的品牌语法，而不是一次性装饰。</a:t>
-            </a:r>
-            <a:endParaRPr lang="en-US" sz="840" dirty="0"/>
-          </a:p>
-        </p:txBody>
-      </p:sp>
-      <p:sp>
-        <p:nvSpPr>
-          <p:cNvPr id="9" name="Shape 6"/>
-          <p:cNvSpPr/>
-          <p:nvPr/>
-        </p:nvSpPr>
-        <p:spPr>
-          <a:xfrm>
-            <a:off x="841248" y="2688336"/>
-            <a:ext cx="420624" cy="420624"/>
+          <p:cNvPr id="6" name="Shape 3"/>
+          <p:cNvSpPr/>
+          <p:nvPr/>
+        </p:nvSpPr>
+        <p:spPr>
+          <a:xfrm>
+            <a:off x="822960" y="1920240"/>
+            <a:ext cx="384048" cy="384048"/>
           </a:xfrm>
           <a:prstGeom prst="ellipse">
             <a:avLst/>
           </a:prstGeom>
           <a:solidFill>
-            <a:srgbClr val="B88A3B">
-              <a:alpha val="92000"/>
-            </a:srgbClr>
+            <a:srgbClr val="B8201A"/>
           </a:solidFill>
           <a:ln w="12700">
             <a:solidFill>
-              <a:srgbClr val="FFFFFF">
-                <a:alpha val="88000"/>
+              <a:srgbClr val="B8201A">
+                <a:alpha val="0"/>
               </a:srgbClr>
             </a:solidFill>
             <a:prstDash val="solid"/>
@@ -1169,14 +1042,14 @@
       </p:sp>
       <p:sp>
         <p:nvSpPr>
-          <p:cNvPr id="10" name="Text 7"/>
-          <p:cNvSpPr/>
-          <p:nvPr/>
-        </p:nvSpPr>
-        <p:spPr>
-          <a:xfrm>
-            <a:off x="841248" y="2798064"/>
-            <a:ext cx="420624" cy="146304"/>
+          <p:cNvPr id="7" name="Text 4"/>
+          <p:cNvSpPr/>
+          <p:nvPr/>
+        </p:nvSpPr>
+        <p:spPr>
+          <a:xfrm>
+            <a:off x="822960" y="2020824"/>
+            <a:ext cx="384048" cy="128016"/>
           </a:xfrm>
           <a:prstGeom prst="rect">
             <a:avLst/>
@@ -1192,7 +1065,7 @@
               <a:buNone/>
             </a:pPr>
             <a:r>
-              <a:rPr lang="en-US" sz="850" b="1" dirty="0">
+              <a:rPr lang="en-US" sz="720" b="1" dirty="0">
                 <a:solidFill>
                   <a:srgbClr val="FFFFFF"/>
                 </a:solidFill>
@@ -1200,22 +1073,22 @@
                 <a:ea typeface="Songti SC" pitchFamily="34" charset="-122"/>
                 <a:cs typeface="Songti SC" pitchFamily="34" charset="-120"/>
               </a:rPr>
-              <a:t>造</a:t>
-            </a:r>
-            <a:endParaRPr lang="en-US" sz="850" dirty="0"/>
-          </a:p>
-        </p:txBody>
-      </p:sp>
-      <p:sp>
-        <p:nvSpPr>
-          <p:cNvPr id="11" name="Text 8"/>
-          <p:cNvSpPr/>
-          <p:nvPr/>
-        </p:nvSpPr>
-        <p:spPr>
-          <a:xfrm>
-            <a:off x="1499616" y="2688336"/>
-            <a:ext cx="4005072" cy="256032"/>
+              <a:t>壹</a:t>
+            </a:r>
+            <a:endParaRPr lang="en-US" sz="720" dirty="0"/>
+          </a:p>
+        </p:txBody>
+      </p:sp>
+      <p:sp>
+        <p:nvSpPr>
+          <p:cNvPr id="8" name="Text 5"/>
+          <p:cNvSpPr/>
+          <p:nvPr/>
+        </p:nvSpPr>
+        <p:spPr>
+          <a:xfrm>
+            <a:off x="1426464" y="1901952"/>
+            <a:ext cx="2743200" cy="256032"/>
           </a:xfrm>
           <a:prstGeom prst="rect">
             <a:avLst/>
@@ -1241,7 +1114,7 @@
                 <a:ea typeface="Songti SC" pitchFamily="34" charset="-122"/>
                 <a:cs typeface="Songti SC" pitchFamily="34" charset="-120"/>
               </a:rPr>
-              <a:t>内容资产成为增长入口</a:t>
+              <a:t>文化表达从符号转向体系</a:t>
             </a:r>
             <a:endParaRPr lang="en-US" sz="1240" dirty="0"/>
           </a:p>
@@ -1249,14 +1122,14 @@
       </p:sp>
       <p:sp>
         <p:nvSpPr>
-          <p:cNvPr id="12" name="Text 9"/>
-          <p:cNvSpPr/>
-          <p:nvPr/>
-        </p:nvSpPr>
-        <p:spPr>
-          <a:xfrm>
-            <a:off x="1499616" y="2999232"/>
-            <a:ext cx="4005072" cy="201168"/>
+          <p:cNvPr id="9" name="Text 6"/>
+          <p:cNvSpPr/>
+          <p:nvPr/>
+        </p:nvSpPr>
+        <p:spPr>
+          <a:xfrm>
+            <a:off x="1426464" y="2231136"/>
+            <a:ext cx="2798064" cy="256032"/>
           </a:xfrm>
           <a:prstGeom prst="rect">
             <a:avLst/>
@@ -1282,7 +1155,7 @@
                 <a:ea typeface="Songti SC" pitchFamily="34" charset="-122"/>
                 <a:cs typeface="Songti SC" pitchFamily="34" charset="-120"/>
               </a:rPr>
-              <a:t>短视频、直播、社群和线下空间会共同放大品牌故事的持续触达。</a:t>
+              <a:t>水墨、器物、纹样和叙事需要统一成可复用的品牌语法，而不是一次性装饰。</a:t>
             </a:r>
             <a:endParaRPr lang="en-US" sz="840" dirty="0"/>
           </a:p>
@@ -1290,27 +1163,25 @@
       </p:sp>
       <p:sp>
         <p:nvSpPr>
-          <p:cNvPr id="13" name="Shape 10"/>
-          <p:cNvSpPr/>
-          <p:nvPr/>
-        </p:nvSpPr>
-        <p:spPr>
-          <a:xfrm>
-            <a:off x="841248" y="3364992"/>
-            <a:ext cx="420624" cy="420624"/>
+          <p:cNvPr id="10" name="Shape 7"/>
+          <p:cNvSpPr/>
+          <p:nvPr/>
+        </p:nvSpPr>
+        <p:spPr>
+          <a:xfrm>
+            <a:off x="822960" y="2706624"/>
+            <a:ext cx="384048" cy="384048"/>
           </a:xfrm>
           <a:prstGeom prst="ellipse">
             <a:avLst/>
           </a:prstGeom>
           <a:solidFill>
-            <a:srgbClr val="1D1D1B">
-              <a:alpha val="92000"/>
-            </a:srgbClr>
+            <a:srgbClr val="B88A3B"/>
           </a:solidFill>
           <a:ln w="12700">
             <a:solidFill>
-              <a:srgbClr val="FFFFFF">
-                <a:alpha val="88000"/>
+              <a:srgbClr val="B88A3B">
+                <a:alpha val="0"/>
               </a:srgbClr>
             </a:solidFill>
             <a:prstDash val="solid"/>
@@ -1319,14 +1190,14 @@
       </p:sp>
       <p:sp>
         <p:nvSpPr>
-          <p:cNvPr id="14" name="Text 11"/>
-          <p:cNvSpPr/>
-          <p:nvPr/>
-        </p:nvSpPr>
-        <p:spPr>
-          <a:xfrm>
-            <a:off x="841248" y="3474720"/>
-            <a:ext cx="420624" cy="146304"/>
+          <p:cNvPr id="11" name="Text 8"/>
+          <p:cNvSpPr/>
+          <p:nvPr/>
+        </p:nvSpPr>
+        <p:spPr>
+          <a:xfrm>
+            <a:off x="822960" y="2807208"/>
+            <a:ext cx="384048" cy="128016"/>
           </a:xfrm>
           <a:prstGeom prst="rect">
             <a:avLst/>
@@ -1342,7 +1213,7 @@
               <a:buNone/>
             </a:pPr>
             <a:r>
-              <a:rPr lang="en-US" sz="850" b="1" dirty="0">
+              <a:rPr lang="en-US" sz="720" b="1" dirty="0">
                 <a:solidFill>
                   <a:srgbClr val="FFFFFF"/>
                 </a:solidFill>
@@ -1350,22 +1221,22 @@
                 <a:ea typeface="Songti SC" pitchFamily="34" charset="-122"/>
                 <a:cs typeface="Songti SC" pitchFamily="34" charset="-120"/>
               </a:rPr>
-              <a:t>新</a:t>
-            </a:r>
-            <a:endParaRPr lang="en-US" sz="850" dirty="0"/>
-          </a:p>
-        </p:txBody>
-      </p:sp>
-      <p:sp>
-        <p:nvSpPr>
-          <p:cNvPr id="15" name="Text 12"/>
-          <p:cNvSpPr/>
-          <p:nvPr/>
-        </p:nvSpPr>
-        <p:spPr>
-          <a:xfrm>
-            <a:off x="1499616" y="3364992"/>
-            <a:ext cx="4005072" cy="256032"/>
+              <a:t>贰</a:t>
+            </a:r>
+            <a:endParaRPr lang="en-US" sz="720" dirty="0"/>
+          </a:p>
+        </p:txBody>
+      </p:sp>
+      <p:sp>
+        <p:nvSpPr>
+          <p:cNvPr id="12" name="Text 9"/>
+          <p:cNvSpPr/>
+          <p:nvPr/>
+        </p:nvSpPr>
+        <p:spPr>
+          <a:xfrm>
+            <a:off x="1426464" y="2688336"/>
+            <a:ext cx="2743200" cy="256032"/>
           </a:xfrm>
           <a:prstGeom prst="rect">
             <a:avLst/>
@@ -1391,7 +1262,7 @@
                 <a:ea typeface="Songti SC" pitchFamily="34" charset="-122"/>
                 <a:cs typeface="Songti SC" pitchFamily="34" charset="-120"/>
               </a:rPr>
-              <a:t>年轻用户更关注真实质感</a:t>
+              <a:t>内容资产成为增长入口</a:t>
             </a:r>
             <a:endParaRPr lang="en-US" sz="1240" dirty="0"/>
           </a:p>
@@ -1399,14 +1270,14 @@
       </p:sp>
       <p:sp>
         <p:nvSpPr>
-          <p:cNvPr id="16" name="Text 13"/>
-          <p:cNvSpPr/>
-          <p:nvPr/>
-        </p:nvSpPr>
-        <p:spPr>
-          <a:xfrm>
-            <a:off x="1499616" y="3675888"/>
-            <a:ext cx="4005072" cy="201168"/>
+          <p:cNvPr id="13" name="Text 10"/>
+          <p:cNvSpPr/>
+          <p:nvPr/>
+        </p:nvSpPr>
+        <p:spPr>
+          <a:xfrm>
+            <a:off x="1426464" y="3017520"/>
+            <a:ext cx="2798064" cy="256032"/>
           </a:xfrm>
           <a:prstGeom prst="rect">
             <a:avLst/>
@@ -1432,7 +1303,7 @@
                 <a:ea typeface="Songti SC" pitchFamily="34" charset="-122"/>
                 <a:cs typeface="Songti SC" pitchFamily="34" charset="-120"/>
               </a:rPr>
-              <a:t>真正有辨识度的东方美学，需要在现代商业信息里保留克制与层次。</a:t>
+              <a:t>短视频、直播、社群和线下空间会共同放大品牌故事的持续触达。</a:t>
             </a:r>
             <a:endParaRPr lang="en-US" sz="840" dirty="0"/>
           </a:p>
@@ -1440,23 +1311,25 @@
       </p:sp>
       <p:sp>
         <p:nvSpPr>
-          <p:cNvPr id="17" name="Shape 14"/>
-          <p:cNvSpPr/>
-          <p:nvPr/>
-        </p:nvSpPr>
-        <p:spPr>
-          <a:xfrm>
-            <a:off x="438912" y="4764024"/>
-            <a:ext cx="5303520" cy="0"/>
-          </a:xfrm>
-          <a:prstGeom prst="line">
-            <a:avLst/>
-          </a:prstGeom>
-          <a:noFill/>
+          <p:cNvPr id="14" name="Shape 11"/>
+          <p:cNvSpPr/>
+          <p:nvPr/>
+        </p:nvSpPr>
+        <p:spPr>
+          <a:xfrm>
+            <a:off x="822960" y="3493008"/>
+            <a:ext cx="384048" cy="384048"/>
+          </a:xfrm>
+          <a:prstGeom prst="ellipse">
+            <a:avLst/>
+          </a:prstGeom>
+          <a:solidFill>
+            <a:srgbClr val="1D1D1B"/>
+          </a:solidFill>
           <a:ln w="12700">
             <a:solidFill>
-              <a:srgbClr val="C8B8A2">
-                <a:alpha val="72000"/>
+              <a:srgbClr val="1D1D1B">
+                <a:alpha val="0"/>
               </a:srgbClr>
             </a:solidFill>
             <a:prstDash val="solid"/>
@@ -1465,14 +1338,53 @@
       </p:sp>
       <p:sp>
         <p:nvSpPr>
-          <p:cNvPr id="18" name="Text 15"/>
-          <p:cNvSpPr/>
-          <p:nvPr/>
-        </p:nvSpPr>
-        <p:spPr>
-          <a:xfrm>
-            <a:off x="896112" y="4992624"/>
-            <a:ext cx="1310640" cy="365760"/>
+          <p:cNvPr id="15" name="Text 12"/>
+          <p:cNvSpPr/>
+          <p:nvPr/>
+        </p:nvSpPr>
+        <p:spPr>
+          <a:xfrm>
+            <a:off x="822960" y="3593592"/>
+            <a:ext cx="384048" cy="128016"/>
+          </a:xfrm>
+          <a:prstGeom prst="rect">
+            <a:avLst/>
+          </a:prstGeom>
+          <a:noFill/>
+          <a:ln/>
+        </p:spPr>
+        <p:txBody>
+          <a:bodyPr wrap="square" lIns="0" tIns="0" rIns="0" bIns="0" rtlCol="0" anchor="ctr"/>
+          <a:lstStyle/>
+          <a:p>
+            <a:pPr algn="ctr" indent="0" marL="0">
+              <a:buNone/>
+            </a:pPr>
+            <a:r>
+              <a:rPr lang="en-US" sz="720" b="1" dirty="0">
+                <a:solidFill>
+                  <a:srgbClr val="FFFFFF"/>
+                </a:solidFill>
+                <a:latin typeface="Songti SC" pitchFamily="34" charset="0"/>
+                <a:ea typeface="Songti SC" pitchFamily="34" charset="-122"/>
+                <a:cs typeface="Songti SC" pitchFamily="34" charset="-120"/>
+              </a:rPr>
+              <a:t>叁</a:t>
+            </a:r>
+            <a:endParaRPr lang="en-US" sz="720" dirty="0"/>
+          </a:p>
+        </p:txBody>
+      </p:sp>
+      <p:sp>
+        <p:nvSpPr>
+          <p:cNvPr id="16" name="Text 13"/>
+          <p:cNvSpPr/>
+          <p:nvPr/>
+        </p:nvSpPr>
+        <p:spPr>
+          <a:xfrm>
+            <a:off x="1426464" y="3474720"/>
+            <a:ext cx="2743200" cy="256032"/>
           </a:xfrm>
           <a:prstGeom prst="rect">
             <a:avLst/>
@@ -1486,34 +1398,34 @@
           </a:bodyPr>
           <a:lstStyle/>
           <a:p>
-            <a:pPr algn="ctr" indent="0" marL="0">
-              <a:buNone/>
-            </a:pPr>
-            <a:r>
-              <a:rPr lang="en-US" sz="1900" b="1" dirty="0">
-                <a:solidFill>
-                  <a:srgbClr val="B8201A"/>
-                </a:solidFill>
-                <a:latin typeface="Songti SC" pitchFamily="34" charset="0"/>
-                <a:ea typeface="Songti SC" pitchFamily="34" charset="-122"/>
-                <a:cs typeface="Songti SC" pitchFamily="34" charset="-120"/>
-              </a:rPr>
-              <a:t>42%</a:t>
-            </a:r>
-            <a:endParaRPr lang="en-US" sz="1900" dirty="0"/>
-          </a:p>
-        </p:txBody>
-      </p:sp>
-      <p:sp>
-        <p:nvSpPr>
-          <p:cNvPr id="19" name="Text 16"/>
-          <p:cNvSpPr/>
-          <p:nvPr/>
-        </p:nvSpPr>
-        <p:spPr>
-          <a:xfrm>
-            <a:off x="896112" y="5404104"/>
-            <a:ext cx="1310640" cy="201168"/>
+            <a:pPr indent="0" marL="0">
+              <a:buNone/>
+            </a:pPr>
+            <a:r>
+              <a:rPr lang="en-US" sz="1240" b="1" dirty="0">
+                <a:solidFill>
+                  <a:srgbClr val="211A16"/>
+                </a:solidFill>
+                <a:latin typeface="Songti SC" pitchFamily="34" charset="0"/>
+                <a:ea typeface="Songti SC" pitchFamily="34" charset="-122"/>
+                <a:cs typeface="Songti SC" pitchFamily="34" charset="-120"/>
+              </a:rPr>
+              <a:t>年轻用户更关注真实质感</a:t>
+            </a:r>
+            <a:endParaRPr lang="en-US" sz="1240" dirty="0"/>
+          </a:p>
+        </p:txBody>
+      </p:sp>
+      <p:sp>
+        <p:nvSpPr>
+          <p:cNvPr id="17" name="Text 14"/>
+          <p:cNvSpPr/>
+          <p:nvPr/>
+        </p:nvSpPr>
+        <p:spPr>
+          <a:xfrm>
+            <a:off x="1426464" y="3803904"/>
+            <a:ext cx="2798064" cy="256032"/>
           </a:xfrm>
           <a:prstGeom prst="rect">
             <a:avLst/>
@@ -1527,88 +1439,34 @@
           </a:bodyPr>
           <a:lstStyle/>
           <a:p>
-            <a:pPr algn="ctr" indent="0" marL="0">
-              <a:buNone/>
-            </a:pPr>
-            <a:r>
-              <a:rPr lang="en-US" sz="720" b="1" dirty="0">
-                <a:solidFill>
-                  <a:srgbClr val="5B4F46"/>
-                </a:solidFill>
-                <a:latin typeface="Songti SC" pitchFamily="34" charset="0"/>
-                <a:ea typeface="Songti SC" pitchFamily="34" charset="-122"/>
-                <a:cs typeface="Songti SC" pitchFamily="34" charset="-120"/>
-              </a:rPr>
-              <a:t>内容复用</a:t>
-            </a:r>
-            <a:endParaRPr lang="en-US" sz="720" dirty="0"/>
-          </a:p>
-        </p:txBody>
-      </p:sp>
-      <p:sp>
-        <p:nvSpPr>
-          <p:cNvPr id="20" name="Shape 17"/>
-          <p:cNvSpPr/>
-          <p:nvPr/>
-        </p:nvSpPr>
-        <p:spPr>
-          <a:xfrm>
-            <a:off x="1473708" y="5660136"/>
-            <a:ext cx="292608" cy="292608"/>
-          </a:xfrm>
-          <a:prstGeom prst="ellipse">
-            <a:avLst/>
-          </a:prstGeom>
-          <a:solidFill>
-            <a:srgbClr val="B8201A">
-              <a:alpha val="42000"/>
-            </a:srgbClr>
-          </a:solidFill>
-          <a:ln w="12700">
-            <a:solidFill>
-              <a:srgbClr val="F9F2E8">
-                <a:alpha val="80000"/>
-              </a:srgbClr>
-            </a:solidFill>
-            <a:prstDash val="solid"/>
-          </a:ln>
-        </p:spPr>
-      </p:sp>
-      <p:sp>
-        <p:nvSpPr>
-          <p:cNvPr id="21" name="Shape 18"/>
-          <p:cNvSpPr/>
-          <p:nvPr/>
-        </p:nvSpPr>
-        <p:spPr>
-          <a:xfrm>
-            <a:off x="2234184" y="5047488"/>
-            <a:ext cx="0" cy="749808"/>
-          </a:xfrm>
-          <a:prstGeom prst="line">
-            <a:avLst/>
-          </a:prstGeom>
-          <a:noFill/>
-          <a:ln w="12700">
-            <a:solidFill>
-              <a:srgbClr val="C8B8A2">
-                <a:alpha val="58000"/>
-              </a:srgbClr>
-            </a:solidFill>
-            <a:prstDash val="solid"/>
-          </a:ln>
-        </p:spPr>
-      </p:sp>
-      <p:sp>
-        <p:nvSpPr>
-          <p:cNvPr id="22" name="Text 19"/>
-          <p:cNvSpPr/>
-          <p:nvPr/>
-        </p:nvSpPr>
-        <p:spPr>
-          <a:xfrm>
-            <a:off x="2343912" y="4992624"/>
-            <a:ext cx="1310640" cy="365760"/>
+            <a:pPr indent="0" marL="0">
+              <a:buNone/>
+            </a:pPr>
+            <a:r>
+              <a:rPr lang="en-US" sz="840" dirty="0">
+                <a:solidFill>
+                  <a:srgbClr val="66584E"/>
+                </a:solidFill>
+                <a:latin typeface="Songti SC" pitchFamily="34" charset="0"/>
+                <a:ea typeface="Songti SC" pitchFamily="34" charset="-122"/>
+                <a:cs typeface="Songti SC" pitchFamily="34" charset="-120"/>
+              </a:rPr>
+              <a:t>真正有辨识度的东方美学，需要在现代商业信息里保留克制与层次。</a:t>
+            </a:r>
+            <a:endParaRPr lang="en-US" sz="840" dirty="0"/>
+          </a:p>
+        </p:txBody>
+      </p:sp>
+      <p:sp>
+        <p:nvSpPr>
+          <p:cNvPr id="18" name="Text 15"/>
+          <p:cNvSpPr/>
+          <p:nvPr/>
+        </p:nvSpPr>
+        <p:spPr>
+          <a:xfrm>
+            <a:off x="4754880" y="1536192"/>
+            <a:ext cx="3429000" cy="329184"/>
           </a:xfrm>
           <a:prstGeom prst="rect">
             <a:avLst/>
@@ -1622,253 +1480,6 @@
           </a:bodyPr>
           <a:lstStyle/>
           <a:p>
-            <a:pPr algn="ctr" indent="0" marL="0">
-              <a:buNone/>
-            </a:pPr>
-            <a:r>
-              <a:rPr lang="en-US" sz="1900" b="1" dirty="0">
-                <a:solidFill>
-                  <a:srgbClr val="1D1D1B"/>
-                </a:solidFill>
-                <a:latin typeface="Songti SC" pitchFamily="34" charset="0"/>
-                <a:ea typeface="Songti SC" pitchFamily="34" charset="-122"/>
-                <a:cs typeface="Songti SC" pitchFamily="34" charset="-120"/>
-              </a:rPr>
-              <a:t>3.2x</a:t>
-            </a:r>
-            <a:endParaRPr lang="en-US" sz="1900" dirty="0"/>
-          </a:p>
-        </p:txBody>
-      </p:sp>
-      <p:sp>
-        <p:nvSpPr>
-          <p:cNvPr id="23" name="Text 20"/>
-          <p:cNvSpPr/>
-          <p:nvPr/>
-        </p:nvSpPr>
-        <p:spPr>
-          <a:xfrm>
-            <a:off x="2343912" y="5404104"/>
-            <a:ext cx="1310640" cy="201168"/>
-          </a:xfrm>
-          <a:prstGeom prst="rect">
-            <a:avLst/>
-          </a:prstGeom>
-          <a:noFill/>
-          <a:ln/>
-        </p:spPr>
-        <p:txBody>
-          <a:bodyPr wrap="square" lIns="0" tIns="0" rIns="0" bIns="0" rtlCol="0" anchor="ctr">
-            <a:normAutofit/>
-          </a:bodyPr>
-          <a:lstStyle/>
-          <a:p>
-            <a:pPr algn="ctr" indent="0" marL="0">
-              <a:buNone/>
-            </a:pPr>
-            <a:r>
-              <a:rPr lang="en-US" sz="720" b="1" dirty="0">
-                <a:solidFill>
-                  <a:srgbClr val="5B4F46"/>
-                </a:solidFill>
-                <a:latin typeface="Songti SC" pitchFamily="34" charset="0"/>
-                <a:ea typeface="Songti SC" pitchFamily="34" charset="-122"/>
-                <a:cs typeface="Songti SC" pitchFamily="34" charset="-120"/>
-              </a:rPr>
-              <a:t>触点扩展</a:t>
-            </a:r>
-            <a:endParaRPr lang="en-US" sz="720" dirty="0"/>
-          </a:p>
-        </p:txBody>
-      </p:sp>
-      <p:sp>
-        <p:nvSpPr>
-          <p:cNvPr id="24" name="Shape 21"/>
-          <p:cNvSpPr/>
-          <p:nvPr/>
-        </p:nvSpPr>
-        <p:spPr>
-          <a:xfrm>
-            <a:off x="2921508" y="5660136"/>
-            <a:ext cx="292608" cy="292608"/>
-          </a:xfrm>
-          <a:prstGeom prst="ellipse">
-            <a:avLst/>
-          </a:prstGeom>
-          <a:solidFill>
-            <a:srgbClr val="1D1D1B">
-              <a:alpha val="42000"/>
-            </a:srgbClr>
-          </a:solidFill>
-          <a:ln w="12700">
-            <a:solidFill>
-              <a:srgbClr val="F9F2E8">
-                <a:alpha val="80000"/>
-              </a:srgbClr>
-            </a:solidFill>
-            <a:prstDash val="solid"/>
-          </a:ln>
-        </p:spPr>
-      </p:sp>
-      <p:sp>
-        <p:nvSpPr>
-          <p:cNvPr id="25" name="Shape 22"/>
-          <p:cNvSpPr/>
-          <p:nvPr/>
-        </p:nvSpPr>
-        <p:spPr>
-          <a:xfrm>
-            <a:off x="3681984" y="5047488"/>
-            <a:ext cx="0" cy="749808"/>
-          </a:xfrm>
-          <a:prstGeom prst="line">
-            <a:avLst/>
-          </a:prstGeom>
-          <a:noFill/>
-          <a:ln w="12700">
-            <a:solidFill>
-              <a:srgbClr val="C8B8A2">
-                <a:alpha val="58000"/>
-              </a:srgbClr>
-            </a:solidFill>
-            <a:prstDash val="solid"/>
-          </a:ln>
-        </p:spPr>
-      </p:sp>
-      <p:sp>
-        <p:nvSpPr>
-          <p:cNvPr id="26" name="Text 23"/>
-          <p:cNvSpPr/>
-          <p:nvPr/>
-        </p:nvSpPr>
-        <p:spPr>
-          <a:xfrm>
-            <a:off x="3791712" y="4992624"/>
-            <a:ext cx="1310640" cy="365760"/>
-          </a:xfrm>
-          <a:prstGeom prst="rect">
-            <a:avLst/>
-          </a:prstGeom>
-          <a:noFill/>
-          <a:ln/>
-        </p:spPr>
-        <p:txBody>
-          <a:bodyPr wrap="square" lIns="0" tIns="0" rIns="0" bIns="0" rtlCol="0" anchor="ctr">
-            <a:normAutofit/>
-          </a:bodyPr>
-          <a:lstStyle/>
-          <a:p>
-            <a:pPr algn="ctr" indent="0" marL="0">
-              <a:buNone/>
-            </a:pPr>
-            <a:r>
-              <a:rPr lang="en-US" sz="1900" b="1" dirty="0">
-                <a:solidFill>
-                  <a:srgbClr val="B88A3B"/>
-                </a:solidFill>
-                <a:latin typeface="Songti SC" pitchFamily="34" charset="0"/>
-                <a:ea typeface="Songti SC" pitchFamily="34" charset="-122"/>
-                <a:cs typeface="Songti SC" pitchFamily="34" charset="-120"/>
-              </a:rPr>
-              <a:t>2026</a:t>
-            </a:r>
-            <a:endParaRPr lang="en-US" sz="1900" dirty="0"/>
-          </a:p>
-        </p:txBody>
-      </p:sp>
-      <p:sp>
-        <p:nvSpPr>
-          <p:cNvPr id="27" name="Text 24"/>
-          <p:cNvSpPr/>
-          <p:nvPr/>
-        </p:nvSpPr>
-        <p:spPr>
-          <a:xfrm>
-            <a:off x="3791712" y="5404104"/>
-            <a:ext cx="1310640" cy="201168"/>
-          </a:xfrm>
-          <a:prstGeom prst="rect">
-            <a:avLst/>
-          </a:prstGeom>
-          <a:noFill/>
-          <a:ln/>
-        </p:spPr>
-        <p:txBody>
-          <a:bodyPr wrap="square" lIns="0" tIns="0" rIns="0" bIns="0" rtlCol="0" anchor="ctr">
-            <a:normAutofit/>
-          </a:bodyPr>
-          <a:lstStyle/>
-          <a:p>
-            <a:pPr algn="ctr" indent="0" marL="0">
-              <a:buNone/>
-            </a:pPr>
-            <a:r>
-              <a:rPr lang="en-US" sz="720" b="1" dirty="0">
-                <a:solidFill>
-                  <a:srgbClr val="5B4F46"/>
-                </a:solidFill>
-                <a:latin typeface="Songti SC" pitchFamily="34" charset="0"/>
-                <a:ea typeface="Songti SC" pitchFamily="34" charset="-122"/>
-                <a:cs typeface="Songti SC" pitchFamily="34" charset="-120"/>
-              </a:rPr>
-              <a:t>品牌焕新</a:t>
-            </a:r>
-            <a:endParaRPr lang="en-US" sz="720" dirty="0"/>
-          </a:p>
-        </p:txBody>
-      </p:sp>
-      <p:sp>
-        <p:nvSpPr>
-          <p:cNvPr id="28" name="Shape 25"/>
-          <p:cNvSpPr/>
-          <p:nvPr/>
-        </p:nvSpPr>
-        <p:spPr>
-          <a:xfrm>
-            <a:off x="4369308" y="5660136"/>
-            <a:ext cx="292608" cy="292608"/>
-          </a:xfrm>
-          <a:prstGeom prst="ellipse">
-            <a:avLst/>
-          </a:prstGeom>
-          <a:solidFill>
-            <a:srgbClr val="B88A3B">
-              <a:alpha val="42000"/>
-            </a:srgbClr>
-          </a:solidFill>
-          <a:ln w="12700">
-            <a:solidFill>
-              <a:srgbClr val="F9F2E8">
-                <a:alpha val="80000"/>
-              </a:srgbClr>
-            </a:solidFill>
-            <a:prstDash val="solid"/>
-          </a:ln>
-        </p:spPr>
-      </p:sp>
-      <p:sp>
-        <p:nvSpPr>
-          <p:cNvPr id="29" name="Text 26"/>
-          <p:cNvSpPr/>
-          <p:nvPr/>
-        </p:nvSpPr>
-        <p:spPr>
-          <a:xfrm>
-            <a:off x="5321808" y="1078992"/>
-            <a:ext cx="3566160" cy="347472"/>
-          </a:xfrm>
-          <a:prstGeom prst="rect">
-            <a:avLst/>
-          </a:prstGeom>
-          <a:noFill/>
-          <a:ln/>
-        </p:spPr>
-        <p:txBody>
-          <a:bodyPr wrap="square" lIns="0" tIns="0" rIns="0" bIns="0" rtlCol="0" anchor="ctr">
-            <a:normAutofit/>
-          </a:bodyPr>
-          <a:lstStyle/>
-          <a:p>
             <a:pPr indent="0" marL="0">
               <a:buNone/>
             </a:pPr>
@@ -1889,13 +1500,13 @@
       </p:sp>
       <p:sp>
         <p:nvSpPr>
-          <p:cNvPr id="30" name="Shape 27"/>
-          <p:cNvSpPr/>
-          <p:nvPr/>
-        </p:nvSpPr>
-        <p:spPr>
-          <a:xfrm>
-            <a:off x="5321808" y="1463040"/>
+          <p:cNvPr id="19" name="Shape 16"/>
+          <p:cNvSpPr/>
+          <p:nvPr/>
+        </p:nvSpPr>
+        <p:spPr>
+          <a:xfrm>
+            <a:off x="4754880" y="1920240"/>
             <a:ext cx="292608" cy="0"/>
           </a:xfrm>
           <a:prstGeom prst="line">
@@ -1912,14 +1523,14 @@
       </p:sp>
       <p:sp>
         <p:nvSpPr>
-          <p:cNvPr id="31" name="Shape 28"/>
-          <p:cNvSpPr/>
-          <p:nvPr/>
-        </p:nvSpPr>
-        <p:spPr>
-          <a:xfrm>
-            <a:off x="5495544" y="4370832"/>
-            <a:ext cx="3172968" cy="0"/>
+          <p:cNvPr id="20" name="Shape 17"/>
+          <p:cNvSpPr/>
+          <p:nvPr/>
+        </p:nvSpPr>
+        <p:spPr>
+          <a:xfrm>
+            <a:off x="5056632" y="4946904"/>
+            <a:ext cx="3593592" cy="0"/>
           </a:xfrm>
           <a:prstGeom prst="line">
             <a:avLst/>
@@ -1937,13 +1548,13 @@
       </p:sp>
       <p:sp>
         <p:nvSpPr>
-          <p:cNvPr id="32" name="Text 29"/>
-          <p:cNvSpPr/>
-          <p:nvPr/>
-        </p:nvSpPr>
-        <p:spPr>
-          <a:xfrm>
-            <a:off x="5166360" y="4306824"/>
+          <p:cNvPr id="21" name="Text 18"/>
+          <p:cNvSpPr/>
+          <p:nvPr/>
+        </p:nvSpPr>
+        <p:spPr>
+          <a:xfrm>
+            <a:off x="4727448" y="4882896"/>
             <a:ext cx="228600" cy="109728"/>
           </a:xfrm>
           <a:prstGeom prst="rect">
@@ -1976,14 +1587,14 @@
       </p:sp>
       <p:sp>
         <p:nvSpPr>
-          <p:cNvPr id="33" name="Shape 30"/>
-          <p:cNvSpPr/>
-          <p:nvPr/>
-        </p:nvSpPr>
-        <p:spPr>
-          <a:xfrm>
-            <a:off x="5495544" y="3767328"/>
-            <a:ext cx="3172968" cy="0"/>
+          <p:cNvPr id="22" name="Shape 19"/>
+          <p:cNvSpPr/>
+          <p:nvPr/>
+        </p:nvSpPr>
+        <p:spPr>
+          <a:xfrm>
+            <a:off x="5056632" y="4322826"/>
+            <a:ext cx="3593592" cy="0"/>
           </a:xfrm>
           <a:prstGeom prst="line">
             <a:avLst/>
@@ -2001,13 +1612,13 @@
       </p:sp>
       <p:sp>
         <p:nvSpPr>
-          <p:cNvPr id="34" name="Text 31"/>
-          <p:cNvSpPr/>
-          <p:nvPr/>
-        </p:nvSpPr>
-        <p:spPr>
-          <a:xfrm>
-            <a:off x="5166360" y="3703320"/>
+          <p:cNvPr id="23" name="Text 20"/>
+          <p:cNvSpPr/>
+          <p:nvPr/>
+        </p:nvSpPr>
+        <p:spPr>
+          <a:xfrm>
+            <a:off x="4727448" y="4258818"/>
             <a:ext cx="228600" cy="109728"/>
           </a:xfrm>
           <a:prstGeom prst="rect">
@@ -2040,14 +1651,14 @@
       </p:sp>
       <p:sp>
         <p:nvSpPr>
-          <p:cNvPr id="35" name="Shape 32"/>
-          <p:cNvSpPr/>
-          <p:nvPr/>
-        </p:nvSpPr>
-        <p:spPr>
-          <a:xfrm>
-            <a:off x="5495544" y="3163824"/>
-            <a:ext cx="3172968" cy="0"/>
+          <p:cNvPr id="24" name="Shape 21"/>
+          <p:cNvSpPr/>
+          <p:nvPr/>
+        </p:nvSpPr>
+        <p:spPr>
+          <a:xfrm>
+            <a:off x="5056632" y="3698748"/>
+            <a:ext cx="3593592" cy="0"/>
           </a:xfrm>
           <a:prstGeom prst="line">
             <a:avLst/>
@@ -2065,13 +1676,13 @@
       </p:sp>
       <p:sp>
         <p:nvSpPr>
-          <p:cNvPr id="36" name="Text 33"/>
-          <p:cNvSpPr/>
-          <p:nvPr/>
-        </p:nvSpPr>
-        <p:spPr>
-          <a:xfrm>
-            <a:off x="5166360" y="3099816"/>
+          <p:cNvPr id="25" name="Text 22"/>
+          <p:cNvSpPr/>
+          <p:nvPr/>
+        </p:nvSpPr>
+        <p:spPr>
+          <a:xfrm>
+            <a:off x="4727448" y="3634740"/>
             <a:ext cx="228600" cy="109728"/>
           </a:xfrm>
           <a:prstGeom prst="rect">
@@ -2104,14 +1715,14 @@
       </p:sp>
       <p:sp>
         <p:nvSpPr>
-          <p:cNvPr id="37" name="Shape 34"/>
-          <p:cNvSpPr/>
-          <p:nvPr/>
-        </p:nvSpPr>
-        <p:spPr>
-          <a:xfrm>
-            <a:off x="5495544" y="2560320"/>
-            <a:ext cx="3172968" cy="0"/>
+          <p:cNvPr id="26" name="Shape 23"/>
+          <p:cNvSpPr/>
+          <p:nvPr/>
+        </p:nvSpPr>
+        <p:spPr>
+          <a:xfrm>
+            <a:off x="5056632" y="3074670"/>
+            <a:ext cx="3593592" cy="0"/>
           </a:xfrm>
           <a:prstGeom prst="line">
             <a:avLst/>
@@ -2129,13 +1740,13 @@
       </p:sp>
       <p:sp>
         <p:nvSpPr>
-          <p:cNvPr id="38" name="Text 35"/>
-          <p:cNvSpPr/>
-          <p:nvPr/>
-        </p:nvSpPr>
-        <p:spPr>
-          <a:xfrm>
-            <a:off x="5166360" y="2496312"/>
+          <p:cNvPr id="27" name="Text 24"/>
+          <p:cNvSpPr/>
+          <p:nvPr/>
+        </p:nvSpPr>
+        <p:spPr>
+          <a:xfrm>
+            <a:off x="4727448" y="3010662"/>
             <a:ext cx="228600" cy="109728"/>
           </a:xfrm>
           <a:prstGeom prst="rect">
@@ -2168,14 +1779,14 @@
       </p:sp>
       <p:sp>
         <p:nvSpPr>
-          <p:cNvPr id="39" name="Shape 36"/>
-          <p:cNvSpPr/>
-          <p:nvPr/>
-        </p:nvSpPr>
-        <p:spPr>
-          <a:xfrm>
-            <a:off x="5495544" y="1956816"/>
-            <a:ext cx="3172968" cy="0"/>
+          <p:cNvPr id="28" name="Shape 25"/>
+          <p:cNvSpPr/>
+          <p:nvPr/>
+        </p:nvSpPr>
+        <p:spPr>
+          <a:xfrm>
+            <a:off x="5056632" y="2450592"/>
+            <a:ext cx="3593592" cy="0"/>
           </a:xfrm>
           <a:prstGeom prst="line">
             <a:avLst/>
@@ -2193,13 +1804,13 @@
       </p:sp>
       <p:sp>
         <p:nvSpPr>
-          <p:cNvPr id="40" name="Text 37"/>
-          <p:cNvSpPr/>
-          <p:nvPr/>
-        </p:nvSpPr>
-        <p:spPr>
-          <a:xfrm>
-            <a:off x="5166360" y="1892808"/>
+          <p:cNvPr id="29" name="Text 26"/>
+          <p:cNvSpPr/>
+          <p:nvPr/>
+        </p:nvSpPr>
+        <p:spPr>
+          <a:xfrm>
+            <a:off x="4727448" y="2386584"/>
             <a:ext cx="228600" cy="109728"/>
           </a:xfrm>
           <a:prstGeom prst="rect">
@@ -2232,14 +1843,14 @@
       </p:sp>
       <p:sp>
         <p:nvSpPr>
-          <p:cNvPr id="41" name="Shape 38"/>
-          <p:cNvSpPr/>
-          <p:nvPr/>
-        </p:nvSpPr>
-        <p:spPr>
-          <a:xfrm>
-            <a:off x="5765543" y="3282330"/>
-            <a:ext cx="253243" cy="1088502"/>
+          <p:cNvPr id="30" name="Shape 27"/>
+          <p:cNvSpPr/>
+          <p:nvPr/>
+        </p:nvSpPr>
+        <p:spPr>
+          <a:xfrm>
+            <a:off x="5348714" y="3818900"/>
+            <a:ext cx="314234" cy="1128004"/>
           </a:xfrm>
           <a:prstGeom prst="rect">
             <a:avLst/>
@@ -2261,14 +1872,14 @@
       </p:sp>
       <p:sp>
         <p:nvSpPr>
-          <p:cNvPr id="42" name="Text 39"/>
-          <p:cNvSpPr/>
-          <p:nvPr/>
-        </p:nvSpPr>
-        <p:spPr>
-          <a:xfrm>
-            <a:off x="5655815" y="3044586"/>
-            <a:ext cx="472699" cy="164592"/>
+          <p:cNvPr id="31" name="Text 28"/>
+          <p:cNvSpPr/>
+          <p:nvPr/>
+        </p:nvSpPr>
+        <p:spPr>
+          <a:xfrm>
+            <a:off x="5238986" y="3581156"/>
+            <a:ext cx="533690" cy="164592"/>
           </a:xfrm>
           <a:prstGeom prst="rect">
             <a:avLst/>
@@ -2302,14 +1913,14 @@
       </p:sp>
       <p:sp>
         <p:nvSpPr>
-          <p:cNvPr id="43" name="Text 40"/>
-          <p:cNvSpPr/>
-          <p:nvPr/>
-        </p:nvSpPr>
-        <p:spPr>
-          <a:xfrm>
-            <a:off x="5522976" y="4498848"/>
-            <a:ext cx="738378" cy="310896"/>
+          <p:cNvPr id="32" name="Text 29"/>
+          <p:cNvSpPr/>
+          <p:nvPr/>
+        </p:nvSpPr>
+        <p:spPr>
+          <a:xfrm>
+            <a:off x="5084064" y="5074920"/>
+            <a:ext cx="843534" cy="310896"/>
           </a:xfrm>
           <a:prstGeom prst="rect">
             <a:avLst/>
@@ -2360,14 +1971,14 @@
       </p:sp>
       <p:sp>
         <p:nvSpPr>
-          <p:cNvPr id="44" name="Shape 41"/>
-          <p:cNvSpPr/>
-          <p:nvPr/>
-        </p:nvSpPr>
-        <p:spPr>
-          <a:xfrm>
-            <a:off x="6558785" y="2919496"/>
-            <a:ext cx="253243" cy="1451336"/>
+          <p:cNvPr id="33" name="Shape 30"/>
+          <p:cNvSpPr/>
+          <p:nvPr/>
+        </p:nvSpPr>
+        <p:spPr>
+          <a:xfrm>
+            <a:off x="6247112" y="3442899"/>
+            <a:ext cx="314234" cy="1504005"/>
           </a:xfrm>
           <a:prstGeom prst="rect">
             <a:avLst/>
@@ -2389,14 +2000,14 @@
       </p:sp>
       <p:sp>
         <p:nvSpPr>
-          <p:cNvPr id="45" name="Text 42"/>
-          <p:cNvSpPr/>
-          <p:nvPr/>
-        </p:nvSpPr>
-        <p:spPr>
-          <a:xfrm>
-            <a:off x="6449057" y="2681752"/>
-            <a:ext cx="472699" cy="164592"/>
+          <p:cNvPr id="34" name="Text 31"/>
+          <p:cNvSpPr/>
+          <p:nvPr/>
+        </p:nvSpPr>
+        <p:spPr>
+          <a:xfrm>
+            <a:off x="6137384" y="3205155"/>
+            <a:ext cx="533690" cy="164592"/>
           </a:xfrm>
           <a:prstGeom prst="rect">
             <a:avLst/>
@@ -2430,14 +2041,14 @@
       </p:sp>
       <p:sp>
         <p:nvSpPr>
-          <p:cNvPr id="46" name="Text 43"/>
-          <p:cNvSpPr/>
-          <p:nvPr/>
-        </p:nvSpPr>
-        <p:spPr>
-          <a:xfrm>
-            <a:off x="6316218" y="4498848"/>
-            <a:ext cx="738378" cy="310896"/>
+          <p:cNvPr id="35" name="Text 32"/>
+          <p:cNvSpPr/>
+          <p:nvPr/>
+        </p:nvSpPr>
+        <p:spPr>
+          <a:xfrm>
+            <a:off x="5982462" y="5074920"/>
+            <a:ext cx="843534" cy="310896"/>
           </a:xfrm>
           <a:prstGeom prst="rect">
             <a:avLst/>
@@ -2488,14 +2099,14 @@
       </p:sp>
       <p:sp>
         <p:nvSpPr>
-          <p:cNvPr id="47" name="Shape 44"/>
-          <p:cNvSpPr/>
-          <p:nvPr/>
-        </p:nvSpPr>
-        <p:spPr>
-          <a:xfrm>
-            <a:off x="7352027" y="2738079"/>
-            <a:ext cx="253243" cy="1632753"/>
+          <p:cNvPr id="36" name="Shape 33"/>
+          <p:cNvSpPr/>
+          <p:nvPr/>
+        </p:nvSpPr>
+        <p:spPr>
+          <a:xfrm>
+            <a:off x="7145510" y="3254898"/>
+            <a:ext cx="314234" cy="1692006"/>
           </a:xfrm>
           <a:prstGeom prst="rect">
             <a:avLst/>
@@ -2517,14 +2128,14 @@
       </p:sp>
       <p:sp>
         <p:nvSpPr>
-          <p:cNvPr id="48" name="Text 45"/>
-          <p:cNvSpPr/>
-          <p:nvPr/>
-        </p:nvSpPr>
-        <p:spPr>
-          <a:xfrm>
-            <a:off x="7242299" y="2500335"/>
-            <a:ext cx="472699" cy="164592"/>
+          <p:cNvPr id="37" name="Text 34"/>
+          <p:cNvSpPr/>
+          <p:nvPr/>
+        </p:nvSpPr>
+        <p:spPr>
+          <a:xfrm>
+            <a:off x="7035782" y="3017154"/>
+            <a:ext cx="533690" cy="164592"/>
           </a:xfrm>
           <a:prstGeom prst="rect">
             <a:avLst/>
@@ -2558,14 +2169,14 @@
       </p:sp>
       <p:sp>
         <p:nvSpPr>
-          <p:cNvPr id="49" name="Text 46"/>
-          <p:cNvSpPr/>
-          <p:nvPr/>
-        </p:nvSpPr>
-        <p:spPr>
-          <a:xfrm>
-            <a:off x="7109460" y="4498848"/>
-            <a:ext cx="738378" cy="310896"/>
+          <p:cNvPr id="38" name="Text 35"/>
+          <p:cNvSpPr/>
+          <p:nvPr/>
+        </p:nvSpPr>
+        <p:spPr>
+          <a:xfrm>
+            <a:off x="6880860" y="5074920"/>
+            <a:ext cx="843534" cy="310896"/>
           </a:xfrm>
           <a:prstGeom prst="rect">
             <a:avLst/>
@@ -2616,14 +2227,14 @@
       </p:sp>
       <p:sp>
         <p:nvSpPr>
-          <p:cNvPr id="50" name="Shape 47"/>
-          <p:cNvSpPr/>
-          <p:nvPr/>
-        </p:nvSpPr>
-        <p:spPr>
-          <a:xfrm>
-            <a:off x="8145269" y="2420600"/>
-            <a:ext cx="253243" cy="1950232"/>
+          <p:cNvPr id="39" name="Shape 36"/>
+          <p:cNvSpPr/>
+          <p:nvPr/>
+        </p:nvSpPr>
+        <p:spPr>
+          <a:xfrm>
+            <a:off x="8043908" y="2925897"/>
+            <a:ext cx="314234" cy="2021007"/>
           </a:xfrm>
           <a:prstGeom prst="rect">
             <a:avLst/>
@@ -2645,14 +2256,14 @@
       </p:sp>
       <p:sp>
         <p:nvSpPr>
-          <p:cNvPr id="51" name="Text 48"/>
-          <p:cNvSpPr/>
-          <p:nvPr/>
-        </p:nvSpPr>
-        <p:spPr>
-          <a:xfrm>
-            <a:off x="8035541" y="2182856"/>
-            <a:ext cx="472699" cy="164592"/>
+          <p:cNvPr id="40" name="Text 37"/>
+          <p:cNvSpPr/>
+          <p:nvPr/>
+        </p:nvSpPr>
+        <p:spPr>
+          <a:xfrm>
+            <a:off x="7934180" y="2688153"/>
+            <a:ext cx="533690" cy="164592"/>
           </a:xfrm>
           <a:prstGeom prst="rect">
             <a:avLst/>
@@ -2686,14 +2297,14 @@
       </p:sp>
       <p:sp>
         <p:nvSpPr>
-          <p:cNvPr id="52" name="Text 49"/>
-          <p:cNvSpPr/>
-          <p:nvPr/>
-        </p:nvSpPr>
-        <p:spPr>
-          <a:xfrm>
-            <a:off x="7902702" y="4498848"/>
-            <a:ext cx="738378" cy="310896"/>
+          <p:cNvPr id="41" name="Text 38"/>
+          <p:cNvSpPr/>
+          <p:nvPr/>
+        </p:nvSpPr>
+        <p:spPr>
+          <a:xfrm>
+            <a:off x="7779258" y="5074920"/>
+            <a:ext cx="843534" cy="310896"/>
           </a:xfrm>
           <a:prstGeom prst="rect">
             <a:avLst/>
@@ -2744,14 +2355,14 @@
       </p:sp>
       <p:sp>
         <p:nvSpPr>
-          <p:cNvPr id="53" name="Shape 50"/>
-          <p:cNvSpPr/>
-          <p:nvPr/>
-        </p:nvSpPr>
-        <p:spPr>
-          <a:xfrm>
-            <a:off x="5892165" y="3428634"/>
-            <a:ext cx="793242" cy="-362834"/>
+          <p:cNvPr id="42" name="Shape 39"/>
+          <p:cNvSpPr/>
+          <p:nvPr/>
+        </p:nvSpPr>
+        <p:spPr>
+          <a:xfrm>
+            <a:off x="5505831" y="3965204"/>
+            <a:ext cx="898398" cy="-376001"/>
           </a:xfrm>
           <a:prstGeom prst="line">
             <a:avLst/>
@@ -2767,14 +2378,14 @@
       </p:sp>
       <p:sp>
         <p:nvSpPr>
-          <p:cNvPr id="54" name="Shape 51"/>
-          <p:cNvSpPr/>
-          <p:nvPr/>
-        </p:nvSpPr>
-        <p:spPr>
-          <a:xfrm>
-            <a:off x="6685407" y="3065800"/>
-            <a:ext cx="793242" cy="-181417"/>
+          <p:cNvPr id="43" name="Shape 40"/>
+          <p:cNvSpPr/>
+          <p:nvPr/>
+        </p:nvSpPr>
+        <p:spPr>
+          <a:xfrm>
+            <a:off x="6404229" y="3589203"/>
+            <a:ext cx="898398" cy="-188001"/>
           </a:xfrm>
           <a:prstGeom prst="line">
             <a:avLst/>
@@ -2790,14 +2401,14 @@
       </p:sp>
       <p:sp>
         <p:nvSpPr>
-          <p:cNvPr id="55" name="Shape 52"/>
-          <p:cNvSpPr/>
-          <p:nvPr/>
-        </p:nvSpPr>
-        <p:spPr>
-          <a:xfrm>
-            <a:off x="7478649" y="2884383"/>
-            <a:ext cx="793242" cy="-317480"/>
+          <p:cNvPr id="44" name="Shape 41"/>
+          <p:cNvSpPr/>
+          <p:nvPr/>
+        </p:nvSpPr>
+        <p:spPr>
+          <a:xfrm>
+            <a:off x="7302627" y="3401202"/>
+            <a:ext cx="898398" cy="-329001"/>
           </a:xfrm>
           <a:prstGeom prst="line">
             <a:avLst/>
@@ -2813,13 +2424,13 @@
       </p:sp>
       <p:sp>
         <p:nvSpPr>
-          <p:cNvPr id="56" name="Shape 53"/>
-          <p:cNvSpPr/>
-          <p:nvPr/>
-        </p:nvSpPr>
-        <p:spPr>
-          <a:xfrm>
-            <a:off x="5837301" y="3373770"/>
+          <p:cNvPr id="45" name="Shape 42"/>
+          <p:cNvSpPr/>
+          <p:nvPr/>
+        </p:nvSpPr>
+        <p:spPr>
+          <a:xfrm>
+            <a:off x="5450967" y="3910340"/>
             <a:ext cx="109728" cy="109728"/>
           </a:xfrm>
           <a:prstGeom prst="ellipse">
@@ -2838,13 +2449,13 @@
       </p:sp>
       <p:sp>
         <p:nvSpPr>
-          <p:cNvPr id="57" name="Shape 54"/>
-          <p:cNvSpPr/>
-          <p:nvPr/>
-        </p:nvSpPr>
-        <p:spPr>
-          <a:xfrm>
-            <a:off x="6630543" y="3010936"/>
+          <p:cNvPr id="46" name="Shape 43"/>
+          <p:cNvSpPr/>
+          <p:nvPr/>
+        </p:nvSpPr>
+        <p:spPr>
+          <a:xfrm>
+            <a:off x="6349365" y="3534339"/>
             <a:ext cx="109728" cy="109728"/>
           </a:xfrm>
           <a:prstGeom prst="ellipse">
@@ -2863,13 +2474,13 @@
       </p:sp>
       <p:sp>
         <p:nvSpPr>
-          <p:cNvPr id="58" name="Shape 55"/>
-          <p:cNvSpPr/>
-          <p:nvPr/>
-        </p:nvSpPr>
-        <p:spPr>
-          <a:xfrm>
-            <a:off x="7423785" y="2829519"/>
+          <p:cNvPr id="47" name="Shape 44"/>
+          <p:cNvSpPr/>
+          <p:nvPr/>
+        </p:nvSpPr>
+        <p:spPr>
+          <a:xfrm>
+            <a:off x="7247763" y="3346338"/>
             <a:ext cx="109728" cy="109728"/>
           </a:xfrm>
           <a:prstGeom prst="ellipse">
@@ -2888,13 +2499,13 @@
       </p:sp>
       <p:sp>
         <p:nvSpPr>
-          <p:cNvPr id="59" name="Shape 56"/>
-          <p:cNvSpPr/>
-          <p:nvPr/>
-        </p:nvSpPr>
-        <p:spPr>
-          <a:xfrm>
-            <a:off x="8217027" y="2512040"/>
+          <p:cNvPr id="48" name="Shape 45"/>
+          <p:cNvSpPr/>
+          <p:nvPr/>
+        </p:nvSpPr>
+        <p:spPr>
+          <a:xfrm>
+            <a:off x="8146161" y="3017337"/>
             <a:ext cx="109728" cy="109728"/>
           </a:xfrm>
           <a:prstGeom prst="ellipse">
@@ -2913,14 +2524,14 @@
       </p:sp>
       <p:sp>
         <p:nvSpPr>
-          <p:cNvPr id="60" name="Text 57"/>
-          <p:cNvSpPr/>
-          <p:nvPr/>
-        </p:nvSpPr>
-        <p:spPr>
-          <a:xfrm>
-            <a:off x="5980176" y="4901184"/>
-            <a:ext cx="2852928" cy="109728"/>
+          <p:cNvPr id="49" name="Text 46"/>
+          <p:cNvSpPr/>
+          <p:nvPr/>
+        </p:nvSpPr>
+        <p:spPr>
+          <a:xfrm>
+            <a:off x="5541264" y="5477256"/>
+            <a:ext cx="3273552" cy="109728"/>
           </a:xfrm>
           <a:prstGeom prst="rect">
             <a:avLst/>
@@ -2954,7 +2565,328 @@
       </p:sp>
       <p:sp>
         <p:nvSpPr>
-          <p:cNvPr id="61" name="Text 58"/>
+          <p:cNvPr id="50" name="Shape 47"/>
+          <p:cNvSpPr/>
+          <p:nvPr/>
+        </p:nvSpPr>
+        <p:spPr>
+          <a:xfrm>
+            <a:off x="9253728" y="1408176"/>
+            <a:ext cx="0" cy="3602736"/>
+          </a:xfrm>
+          <a:prstGeom prst="line">
+            <a:avLst/>
+          </a:prstGeom>
+          <a:noFill/>
+          <a:ln w="12700">
+            <a:solidFill>
+              <a:srgbClr val="C8B8A2">
+                <a:alpha val="75000"/>
+              </a:srgbClr>
+            </a:solidFill>
+            <a:prstDash val="solid"/>
+          </a:ln>
+        </p:spPr>
+      </p:sp>
+      <p:sp>
+        <p:nvSpPr>
+          <p:cNvPr id="51" name="Text 48"/>
+          <p:cNvSpPr/>
+          <p:nvPr/>
+        </p:nvSpPr>
+        <p:spPr>
+          <a:xfrm>
+            <a:off x="9418320" y="1499616"/>
+            <a:ext cx="1371600" cy="329184"/>
+          </a:xfrm>
+          <a:prstGeom prst="rect">
+            <a:avLst/>
+          </a:prstGeom>
+          <a:noFill/>
+          <a:ln/>
+        </p:spPr>
+        <p:txBody>
+          <a:bodyPr wrap="square" lIns="0" tIns="0" rIns="0" bIns="0" rtlCol="0" anchor="ctr">
+            <a:normAutofit/>
+          </a:bodyPr>
+          <a:lstStyle/>
+          <a:p>
+            <a:pPr indent="0" marL="0">
+              <a:buNone/>
+            </a:pPr>
+            <a:r>
+              <a:rPr lang="en-US" sz="1650" b="1" dirty="0">
+                <a:solidFill>
+                  <a:srgbClr val="B8201A"/>
+                </a:solidFill>
+                <a:latin typeface="Songti SC" pitchFamily="34" charset="0"/>
+                <a:ea typeface="Songti SC" pitchFamily="34" charset="-122"/>
+                <a:cs typeface="Songti SC" pitchFamily="34" charset="-120"/>
+              </a:rPr>
+              <a:t>42%</a:t>
+            </a:r>
+            <a:endParaRPr lang="en-US" sz="1650" dirty="0"/>
+          </a:p>
+        </p:txBody>
+      </p:sp>
+      <p:sp>
+        <p:nvSpPr>
+          <p:cNvPr id="52" name="Text 49"/>
+          <p:cNvSpPr/>
+          <p:nvPr/>
+        </p:nvSpPr>
+        <p:spPr>
+          <a:xfrm>
+            <a:off x="9418320" y="1920240"/>
+            <a:ext cx="1371600" cy="201168"/>
+          </a:xfrm>
+          <a:prstGeom prst="rect">
+            <a:avLst/>
+          </a:prstGeom>
+          <a:noFill/>
+          <a:ln/>
+        </p:spPr>
+        <p:txBody>
+          <a:bodyPr wrap="square" lIns="0" tIns="0" rIns="0" bIns="0" rtlCol="0" anchor="ctr">
+            <a:normAutofit/>
+          </a:bodyPr>
+          <a:lstStyle/>
+          <a:p>
+            <a:pPr indent="0" marL="0">
+              <a:buNone/>
+            </a:pPr>
+            <a:r>
+              <a:rPr lang="en-US" sz="700" b="1" dirty="0">
+                <a:solidFill>
+                  <a:srgbClr val="5B4F46"/>
+                </a:solidFill>
+                <a:latin typeface="Songti SC" pitchFamily="34" charset="0"/>
+                <a:ea typeface="Songti SC" pitchFamily="34" charset="-122"/>
+                <a:cs typeface="Songti SC" pitchFamily="34" charset="-120"/>
+              </a:rPr>
+              <a:t>内容复用</a:t>
+            </a:r>
+            <a:endParaRPr lang="en-US" sz="700" dirty="0"/>
+          </a:p>
+        </p:txBody>
+      </p:sp>
+      <p:sp>
+        <p:nvSpPr>
+          <p:cNvPr id="53" name="Shape 50"/>
+          <p:cNvSpPr/>
+          <p:nvPr/>
+        </p:nvSpPr>
+        <p:spPr>
+          <a:xfrm>
+            <a:off x="9253728" y="2554224"/>
+            <a:ext cx="1554480" cy="0"/>
+          </a:xfrm>
+          <a:prstGeom prst="line">
+            <a:avLst/>
+          </a:prstGeom>
+          <a:noFill/>
+          <a:ln w="12700">
+            <a:solidFill>
+              <a:srgbClr val="C8B8A2">
+                <a:alpha val="52000"/>
+              </a:srgbClr>
+            </a:solidFill>
+            <a:prstDash val="solid"/>
+          </a:ln>
+        </p:spPr>
+      </p:sp>
+      <p:sp>
+        <p:nvSpPr>
+          <p:cNvPr id="54" name="Text 51"/>
+          <p:cNvSpPr/>
+          <p:nvPr/>
+        </p:nvSpPr>
+        <p:spPr>
+          <a:xfrm>
+            <a:off x="9418320" y="2663952"/>
+            <a:ext cx="1371600" cy="329184"/>
+          </a:xfrm>
+          <a:prstGeom prst="rect">
+            <a:avLst/>
+          </a:prstGeom>
+          <a:noFill/>
+          <a:ln/>
+        </p:spPr>
+        <p:txBody>
+          <a:bodyPr wrap="square" lIns="0" tIns="0" rIns="0" bIns="0" rtlCol="0" anchor="ctr">
+            <a:normAutofit/>
+          </a:bodyPr>
+          <a:lstStyle/>
+          <a:p>
+            <a:pPr indent="0" marL="0">
+              <a:buNone/>
+            </a:pPr>
+            <a:r>
+              <a:rPr lang="en-US" sz="1650" b="1" dirty="0">
+                <a:solidFill>
+                  <a:srgbClr val="1D1D1B"/>
+                </a:solidFill>
+                <a:latin typeface="Songti SC" pitchFamily="34" charset="0"/>
+                <a:ea typeface="Songti SC" pitchFamily="34" charset="-122"/>
+                <a:cs typeface="Songti SC" pitchFamily="34" charset="-120"/>
+              </a:rPr>
+              <a:t>3.2x</a:t>
+            </a:r>
+            <a:endParaRPr lang="en-US" sz="1650" dirty="0"/>
+          </a:p>
+        </p:txBody>
+      </p:sp>
+      <p:sp>
+        <p:nvSpPr>
+          <p:cNvPr id="55" name="Text 52"/>
+          <p:cNvSpPr/>
+          <p:nvPr/>
+        </p:nvSpPr>
+        <p:spPr>
+          <a:xfrm>
+            <a:off x="9418320" y="3084576"/>
+            <a:ext cx="1371600" cy="201168"/>
+          </a:xfrm>
+          <a:prstGeom prst="rect">
+            <a:avLst/>
+          </a:prstGeom>
+          <a:noFill/>
+          <a:ln/>
+        </p:spPr>
+        <p:txBody>
+          <a:bodyPr wrap="square" lIns="0" tIns="0" rIns="0" bIns="0" rtlCol="0" anchor="ctr">
+            <a:normAutofit/>
+          </a:bodyPr>
+          <a:lstStyle/>
+          <a:p>
+            <a:pPr indent="0" marL="0">
+              <a:buNone/>
+            </a:pPr>
+            <a:r>
+              <a:rPr lang="en-US" sz="700" b="1" dirty="0">
+                <a:solidFill>
+                  <a:srgbClr val="5B4F46"/>
+                </a:solidFill>
+                <a:latin typeface="Songti SC" pitchFamily="34" charset="0"/>
+                <a:ea typeface="Songti SC" pitchFamily="34" charset="-122"/>
+                <a:cs typeface="Songti SC" pitchFamily="34" charset="-120"/>
+              </a:rPr>
+              <a:t>触点扩展</a:t>
+            </a:r>
+            <a:endParaRPr lang="en-US" sz="700" dirty="0"/>
+          </a:p>
+        </p:txBody>
+      </p:sp>
+      <p:sp>
+        <p:nvSpPr>
+          <p:cNvPr id="56" name="Shape 53"/>
+          <p:cNvSpPr/>
+          <p:nvPr/>
+        </p:nvSpPr>
+        <p:spPr>
+          <a:xfrm>
+            <a:off x="9253728" y="3718560"/>
+            <a:ext cx="1554480" cy="0"/>
+          </a:xfrm>
+          <a:prstGeom prst="line">
+            <a:avLst/>
+          </a:prstGeom>
+          <a:noFill/>
+          <a:ln w="12700">
+            <a:solidFill>
+              <a:srgbClr val="C8B8A2">
+                <a:alpha val="52000"/>
+              </a:srgbClr>
+            </a:solidFill>
+            <a:prstDash val="solid"/>
+          </a:ln>
+        </p:spPr>
+      </p:sp>
+      <p:sp>
+        <p:nvSpPr>
+          <p:cNvPr id="57" name="Text 54"/>
+          <p:cNvSpPr/>
+          <p:nvPr/>
+        </p:nvSpPr>
+        <p:spPr>
+          <a:xfrm>
+            <a:off x="9418320" y="3828288"/>
+            <a:ext cx="1371600" cy="329184"/>
+          </a:xfrm>
+          <a:prstGeom prst="rect">
+            <a:avLst/>
+          </a:prstGeom>
+          <a:noFill/>
+          <a:ln/>
+        </p:spPr>
+        <p:txBody>
+          <a:bodyPr wrap="square" lIns="0" tIns="0" rIns="0" bIns="0" rtlCol="0" anchor="ctr">
+            <a:normAutofit/>
+          </a:bodyPr>
+          <a:lstStyle/>
+          <a:p>
+            <a:pPr indent="0" marL="0">
+              <a:buNone/>
+            </a:pPr>
+            <a:r>
+              <a:rPr lang="en-US" sz="1650" b="1" dirty="0">
+                <a:solidFill>
+                  <a:srgbClr val="B88A3B"/>
+                </a:solidFill>
+                <a:latin typeface="Songti SC" pitchFamily="34" charset="0"/>
+                <a:ea typeface="Songti SC" pitchFamily="34" charset="-122"/>
+                <a:cs typeface="Songti SC" pitchFamily="34" charset="-120"/>
+              </a:rPr>
+              <a:t>2026</a:t>
+            </a:r>
+            <a:endParaRPr lang="en-US" sz="1650" dirty="0"/>
+          </a:p>
+        </p:txBody>
+      </p:sp>
+      <p:sp>
+        <p:nvSpPr>
+          <p:cNvPr id="58" name="Text 55"/>
+          <p:cNvSpPr/>
+          <p:nvPr/>
+        </p:nvSpPr>
+        <p:spPr>
+          <a:xfrm>
+            <a:off x="9418320" y="4248912"/>
+            <a:ext cx="1371600" cy="201168"/>
+          </a:xfrm>
+          <a:prstGeom prst="rect">
+            <a:avLst/>
+          </a:prstGeom>
+          <a:noFill/>
+          <a:ln/>
+        </p:spPr>
+        <p:txBody>
+          <a:bodyPr wrap="square" lIns="0" tIns="0" rIns="0" bIns="0" rtlCol="0" anchor="ctr">
+            <a:normAutofit/>
+          </a:bodyPr>
+          <a:lstStyle/>
+          <a:p>
+            <a:pPr indent="0" marL="0">
+              <a:buNone/>
+            </a:pPr>
+            <a:r>
+              <a:rPr lang="en-US" sz="700" b="1" dirty="0">
+                <a:solidFill>
+                  <a:srgbClr val="5B4F46"/>
+                </a:solidFill>
+                <a:latin typeface="Songti SC" pitchFamily="34" charset="0"/>
+                <a:ea typeface="Songti SC" pitchFamily="34" charset="-122"/>
+                <a:cs typeface="Songti SC" pitchFamily="34" charset="-120"/>
+              </a:rPr>
+              <a:t>品牌焕新</a:t>
+            </a:r>
+            <a:endParaRPr lang="en-US" sz="700" dirty="0"/>
+          </a:p>
+        </p:txBody>
+      </p:sp>
+      <p:sp>
+        <p:nvSpPr>
+          <p:cNvPr id="59" name="Text 56"/>
           <p:cNvSpPr/>
           <p:nvPr/>
         </p:nvSpPr>
